--- a/slides/07-json-and-jsonb.pptx
+++ b/slides/07-json-and-jsonb.pptx
@@ -207,7 +207,7 @@
           <a:p>
             <a:fld id="{15DA2908-672F-DC48-8CAD-AEE711B947DA}" type="datetimeFigureOut">
               <a:rPr lang="en-US" smtClean="0"/>
-              <a:t>6/29/25</a:t>
+              <a:t>7/28/26</a:t>
             </a:fld>
             <a:endParaRPr lang="en-US"/>
           </a:p>
@@ -729,6 +729,13 @@
               </a:ext>
             </a:extLst>
           </p:spPr>
+          <p:txBody>
+            <a:bodyPr/>
+            <a:lstStyle/>
+            <a:p>
+              <a:endParaRPr lang="en-US"/>
+            </a:p>
+          </p:txBody>
         </p:sp>
         <p:sp>
           <p:nvSpPr>
@@ -797,6 +804,13 @@
               </a:ext>
             </a:extLst>
           </p:spPr>
+          <p:txBody>
+            <a:bodyPr/>
+            <a:lstStyle/>
+            <a:p>
+              <a:endParaRPr lang="en-US"/>
+            </a:p>
+          </p:txBody>
         </p:sp>
         <p:sp>
           <p:nvSpPr>
@@ -870,6 +884,13 @@
               </a:ext>
             </a:extLst>
           </p:spPr>
+          <p:txBody>
+            <a:bodyPr/>
+            <a:lstStyle/>
+            <a:p>
+              <a:endParaRPr lang="en-US"/>
+            </a:p>
+          </p:txBody>
         </p:sp>
         <p:sp>
           <p:nvSpPr>
@@ -933,6 +954,13 @@
               </a:ext>
             </a:extLst>
           </p:spPr>
+          <p:txBody>
+            <a:bodyPr/>
+            <a:lstStyle/>
+            <a:p>
+              <a:endParaRPr lang="en-US"/>
+            </a:p>
+          </p:txBody>
         </p:sp>
         <p:sp>
           <p:nvSpPr>
@@ -986,6 +1014,13 @@
               </a:ext>
             </a:extLst>
           </p:spPr>
+          <p:txBody>
+            <a:bodyPr/>
+            <a:lstStyle/>
+            <a:p>
+              <a:endParaRPr lang="en-US"/>
+            </a:p>
+          </p:txBody>
         </p:sp>
         <p:sp>
           <p:nvSpPr>
@@ -1049,6 +1084,13 @@
               </a:ext>
             </a:extLst>
           </p:spPr>
+          <p:txBody>
+            <a:bodyPr/>
+            <a:lstStyle/>
+            <a:p>
+              <a:endParaRPr lang="en-US"/>
+            </a:p>
+          </p:txBody>
         </p:sp>
         <p:sp>
           <p:nvSpPr>
@@ -1107,6 +1149,13 @@
               </a:ext>
             </a:extLst>
           </p:spPr>
+          <p:txBody>
+            <a:bodyPr/>
+            <a:lstStyle/>
+            <a:p>
+              <a:endParaRPr lang="en-US"/>
+            </a:p>
+          </p:txBody>
         </p:sp>
         <p:sp>
           <p:nvSpPr>
@@ -1160,6 +1209,13 @@
               </a:ext>
             </a:extLst>
           </p:spPr>
+          <p:txBody>
+            <a:bodyPr/>
+            <a:lstStyle/>
+            <a:p>
+              <a:endParaRPr lang="en-US"/>
+            </a:p>
+          </p:txBody>
         </p:sp>
         <p:sp>
           <p:nvSpPr>
@@ -1218,6 +1274,13 @@
               </a:ext>
             </a:extLst>
           </p:spPr>
+          <p:txBody>
+            <a:bodyPr/>
+            <a:lstStyle/>
+            <a:p>
+              <a:endParaRPr lang="en-US"/>
+            </a:p>
+          </p:txBody>
         </p:sp>
         <p:sp>
           <p:nvSpPr>
@@ -1271,6 +1334,13 @@
               </a:ext>
             </a:extLst>
           </p:spPr>
+          <p:txBody>
+            <a:bodyPr/>
+            <a:lstStyle/>
+            <a:p>
+              <a:endParaRPr lang="en-US"/>
+            </a:p>
+          </p:txBody>
         </p:sp>
         <p:sp>
           <p:nvSpPr>
@@ -1329,6 +1399,13 @@
               </a:ext>
             </a:extLst>
           </p:spPr>
+          <p:txBody>
+            <a:bodyPr/>
+            <a:lstStyle/>
+            <a:p>
+              <a:endParaRPr lang="en-US"/>
+            </a:p>
+          </p:txBody>
         </p:sp>
         <p:sp>
           <p:nvSpPr>
@@ -1382,6 +1459,13 @@
               </a:ext>
             </a:extLst>
           </p:spPr>
+          <p:txBody>
+            <a:bodyPr/>
+            <a:lstStyle/>
+            <a:p>
+              <a:endParaRPr lang="en-US"/>
+            </a:p>
+          </p:txBody>
         </p:sp>
         <p:sp>
           <p:nvSpPr>
@@ -1440,6 +1524,13 @@
               </a:ext>
             </a:extLst>
           </p:spPr>
+          <p:txBody>
+            <a:bodyPr/>
+            <a:lstStyle/>
+            <a:p>
+              <a:endParaRPr lang="en-US"/>
+            </a:p>
+          </p:txBody>
         </p:sp>
         <p:sp>
           <p:nvSpPr>
@@ -1498,6 +1589,13 @@
               </a:ext>
             </a:extLst>
           </p:spPr>
+          <p:txBody>
+            <a:bodyPr/>
+            <a:lstStyle/>
+            <a:p>
+              <a:endParaRPr lang="en-US"/>
+            </a:p>
+          </p:txBody>
         </p:sp>
         <p:sp>
           <p:nvSpPr>
@@ -1556,6 +1654,13 @@
               </a:ext>
             </a:extLst>
           </p:spPr>
+          <p:txBody>
+            <a:bodyPr/>
+            <a:lstStyle/>
+            <a:p>
+              <a:endParaRPr lang="en-US"/>
+            </a:p>
+          </p:txBody>
         </p:sp>
         <p:sp>
           <p:nvSpPr>
@@ -1609,6 +1714,13 @@
               </a:ext>
             </a:extLst>
           </p:spPr>
+          <p:txBody>
+            <a:bodyPr/>
+            <a:lstStyle/>
+            <a:p>
+              <a:endParaRPr lang="en-US"/>
+            </a:p>
+          </p:txBody>
         </p:sp>
         <p:sp>
           <p:nvSpPr>
@@ -1662,6 +1774,13 @@
               </a:ext>
             </a:extLst>
           </p:spPr>
+          <p:txBody>
+            <a:bodyPr/>
+            <a:lstStyle/>
+            <a:p>
+              <a:endParaRPr lang="en-US"/>
+            </a:p>
+          </p:txBody>
         </p:sp>
         <p:sp>
           <p:nvSpPr>
@@ -1715,6 +1834,13 @@
               </a:ext>
             </a:extLst>
           </p:spPr>
+          <p:txBody>
+            <a:bodyPr/>
+            <a:lstStyle/>
+            <a:p>
+              <a:endParaRPr lang="en-US"/>
+            </a:p>
+          </p:txBody>
         </p:sp>
         <p:sp>
           <p:nvSpPr>
@@ -1768,6 +1894,13 @@
               </a:ext>
             </a:extLst>
           </p:spPr>
+          <p:txBody>
+            <a:bodyPr/>
+            <a:lstStyle/>
+            <a:p>
+              <a:endParaRPr lang="en-US"/>
+            </a:p>
+          </p:txBody>
         </p:sp>
       </p:grpSp>
       <p:grpSp>
@@ -1821,6 +1954,13 @@
               <a:schemeClr val="lt1"/>
             </a:fontRef>
           </p:style>
+          <p:txBody>
+            <a:bodyPr/>
+            <a:lstStyle/>
+            <a:p>
+              <a:endParaRPr lang="en-US"/>
+            </a:p>
+          </p:txBody>
         </p:sp>
         <p:sp>
           <p:nvSpPr>
@@ -1859,6 +1999,13 @@
               <a:schemeClr val="lt1"/>
             </a:fontRef>
           </p:style>
+          <p:txBody>
+            <a:bodyPr/>
+            <a:lstStyle/>
+            <a:p>
+              <a:endParaRPr lang="en-US"/>
+            </a:p>
+          </p:txBody>
         </p:sp>
         <p:sp>
           <p:nvSpPr>
@@ -1897,6 +2044,13 @@
               <a:schemeClr val="lt1"/>
             </a:fontRef>
           </p:style>
+          <p:txBody>
+            <a:bodyPr/>
+            <a:lstStyle/>
+            <a:p>
+              <a:endParaRPr lang="en-US"/>
+            </a:p>
+          </p:txBody>
         </p:sp>
       </p:grpSp>
       <p:sp>
@@ -2040,7 +2194,7 @@
           <a:p>
             <a:fld id="{F6CCBF3A-D7FB-4B97-8FD5-6FFB20CB1E84}" type="datetimeFigureOut">
               <a:rPr lang="en-US" smtClean="0"/>
-              <a:t>6/29/25</a:t>
+              <a:t>7/28/26</a:t>
             </a:fld>
             <a:endParaRPr lang="en-US"/>
           </a:p>
@@ -3499,7 +3653,7 @@
           <a:p>
             <a:fld id="{F6CCBF3A-D7FB-4B97-8FD5-6FFB20CB1E84}" type="datetimeFigureOut">
               <a:rPr lang="en-US" smtClean="0"/>
-              <a:t>6/29/25</a:t>
+              <a:t>7/28/26</a:t>
             </a:fld>
             <a:endParaRPr lang="en-US"/>
           </a:p>
@@ -4952,7 +5106,7 @@
           <a:p>
             <a:fld id="{F6CCBF3A-D7FB-4B97-8FD5-6FFB20CB1E84}" type="datetimeFigureOut">
               <a:rPr lang="en-US" smtClean="0"/>
-              <a:t>6/29/25</a:t>
+              <a:t>7/28/26</a:t>
             </a:fld>
             <a:endParaRPr lang="en-US"/>
           </a:p>
@@ -7563,7 +7717,7 @@
           <a:p>
             <a:fld id="{F6CCBF3A-D7FB-4B97-8FD5-6FFB20CB1E84}" type="datetimeFigureOut">
               <a:rPr lang="en-US" smtClean="0"/>
-              <a:t>6/29/25</a:t>
+              <a:t>7/28/26</a:t>
             </a:fld>
             <a:endParaRPr lang="en-US"/>
           </a:p>
@@ -9071,7 +9225,7 @@
           <a:p>
             <a:fld id="{F6CCBF3A-D7FB-4B97-8FD5-6FFB20CB1E84}" type="datetimeFigureOut">
               <a:rPr lang="en-US" smtClean="0"/>
-              <a:t>6/29/25</a:t>
+              <a:t>7/28/26</a:t>
             </a:fld>
             <a:endParaRPr lang="en-US"/>
           </a:p>
@@ -10592,7 +10746,7 @@
           <a:p>
             <a:fld id="{F6CCBF3A-D7FB-4B97-8FD5-6FFB20CB1E84}" type="datetimeFigureOut">
               <a:rPr lang="en-US" smtClean="0"/>
-              <a:t>6/29/25</a:t>
+              <a:t>7/28/26</a:t>
             </a:fld>
             <a:endParaRPr lang="en-US"/>
           </a:p>
@@ -12257,7 +12411,7 @@
           <a:p>
             <a:fld id="{F6CCBF3A-D7FB-4B97-8FD5-6FFB20CB1E84}" type="datetimeFigureOut">
               <a:rPr lang="en-US" smtClean="0"/>
-              <a:t>6/29/25</a:t>
+              <a:t>7/28/26</a:t>
             </a:fld>
             <a:endParaRPr lang="en-US"/>
           </a:p>
@@ -13655,7 +13809,7 @@
           <a:p>
             <a:fld id="{F6CCBF3A-D7FB-4B97-8FD5-6FFB20CB1E84}" type="datetimeFigureOut">
               <a:rPr lang="en-US" smtClean="0"/>
-              <a:t>6/29/25</a:t>
+              <a:t>7/28/26</a:t>
             </a:fld>
             <a:endParaRPr lang="en-US"/>
           </a:p>
@@ -13755,7 +13909,7 @@
           <a:p>
             <a:fld id="{F6CCBF3A-D7FB-4B97-8FD5-6FFB20CB1E84}" type="datetimeFigureOut">
               <a:rPr lang="en-US" smtClean="0"/>
-              <a:t>6/29/25</a:t>
+              <a:t>7/28/26</a:t>
             </a:fld>
             <a:endParaRPr lang="en-US"/>
           </a:p>
@@ -15281,7 +15435,7 @@
           <a:p>
             <a:fld id="{F6CCBF3A-D7FB-4B97-8FD5-6FFB20CB1E84}" type="datetimeFigureOut">
               <a:rPr lang="en-US" smtClean="0"/>
-              <a:t>6/29/25</a:t>
+              <a:t>7/28/26</a:t>
             </a:fld>
             <a:endParaRPr lang="en-US"/>
           </a:p>
@@ -16817,7 +16971,7 @@
           <a:p>
             <a:fld id="{F6CCBF3A-D7FB-4B97-8FD5-6FFB20CB1E84}" type="datetimeFigureOut">
               <a:rPr lang="en-US" smtClean="0"/>
-              <a:t>6/29/25</a:t>
+              <a:t>7/28/26</a:t>
             </a:fld>
             <a:endParaRPr lang="en-US"/>
           </a:p>
@@ -17040,7 +17194,7 @@
           <a:p>
             <a:fld id="{F6CCBF3A-D7FB-4B97-8FD5-6FFB20CB1E84}" type="datetimeFigureOut">
               <a:rPr lang="en-US" smtClean="0"/>
-              <a:t>6/29/25</a:t>
+              <a:t>7/28/26</a:t>
             </a:fld>
             <a:endParaRPr lang="en-US"/>
           </a:p>
